--- a/myyntidata_analyysi_24.03.pptx
+++ b/myyntidata_analyysi_24.03.pptx
@@ -262,7 +262,7 @@
           <a:p>
             <a:fld id="{C69068A3-8D85-44C6-AAD8-2C6893CBFFD1}" type="datetimeFigureOut">
               <a:rPr lang="fi-FI" smtClean="0"/>
-              <a:t>30.3.2026</a:t>
+              <a:t>2.4.2026</a:t>
             </a:fld>
             <a:endParaRPr lang="fi-FI"/>
           </a:p>
@@ -683,7 +683,7 @@
           <a:p>
             <a:fld id="{0FADD057-9C00-44D1-BC01-EEDD6769F7A9}" type="datetime1">
               <a:rPr lang="en-US" smtClean="0"/>
-              <a:t>3/30/2026</a:t>
+              <a:t>4/2/2026</a:t>
             </a:fld>
             <a:endParaRPr lang="en-US"/>
           </a:p>
@@ -891,7 +891,7 @@
           <a:p>
             <a:fld id="{E0C826C7-1B51-4D08-8CE8-E9D74FD6E0B3}" type="datetime1">
               <a:rPr lang="en-US" smtClean="0"/>
-              <a:t>3/30/2026</a:t>
+              <a:t>4/2/2026</a:t>
             </a:fld>
             <a:endParaRPr lang="en-US"/>
           </a:p>
@@ -1101,7 +1101,7 @@
           <a:p>
             <a:fld id="{7BBF553C-FBAE-4419-8630-48B494A669D8}" type="datetime1">
               <a:rPr lang="en-US" smtClean="0"/>
-              <a:t>3/30/2026</a:t>
+              <a:t>4/2/2026</a:t>
             </a:fld>
             <a:endParaRPr lang="en-US"/>
           </a:p>
@@ -1299,7 +1299,7 @@
           <a:p>
             <a:fld id="{2FACC3A4-1A46-4E97-B363-292E86FD533D}" type="datetime1">
               <a:rPr lang="en-US" smtClean="0"/>
-              <a:t>3/30/2026</a:t>
+              <a:t>4/2/2026</a:t>
             </a:fld>
             <a:endParaRPr lang="en-US"/>
           </a:p>
@@ -1577,7 +1577,7 @@
           <a:p>
             <a:fld id="{9724CDCD-2247-4071-A772-93FE614412B9}" type="datetime1">
               <a:rPr lang="en-US" smtClean="0"/>
-              <a:t>3/30/2026</a:t>
+              <a:t>4/2/2026</a:t>
             </a:fld>
             <a:endParaRPr lang="en-US"/>
           </a:p>
@@ -1849,7 +1849,7 @@
           <a:p>
             <a:fld id="{35AF518C-BF61-4CDD-90FF-D843FCA5B2FF}" type="datetime1">
               <a:rPr lang="en-US" smtClean="0"/>
-              <a:t>3/30/2026</a:t>
+              <a:t>4/2/2026</a:t>
             </a:fld>
             <a:endParaRPr lang="en-US"/>
           </a:p>
@@ -2273,7 +2273,7 @@
           <a:p>
             <a:fld id="{E46D59EF-B17A-4F46-B446-D27DF20D1D99}" type="datetime1">
               <a:rPr lang="en-US" smtClean="0"/>
-              <a:t>3/30/2026</a:t>
+              <a:t>4/2/2026</a:t>
             </a:fld>
             <a:endParaRPr lang="en-US"/>
           </a:p>
@@ -2414,7 +2414,7 @@
           <a:p>
             <a:fld id="{CCA4D121-5BD2-4986-83C5-B6AA3741F170}" type="datetime1">
               <a:rPr lang="en-US" smtClean="0"/>
-              <a:t>3/30/2026</a:t>
+              <a:t>4/2/2026</a:t>
             </a:fld>
             <a:endParaRPr lang="en-US"/>
           </a:p>
@@ -2527,7 +2527,7 @@
           <a:p>
             <a:fld id="{C720FE45-3D2D-4720-B6D2-B716EF21CD11}" type="datetime1">
               <a:rPr lang="en-US" smtClean="0"/>
-              <a:t>3/30/2026</a:t>
+              <a:t>4/2/2026</a:t>
             </a:fld>
             <a:endParaRPr lang="en-US"/>
           </a:p>
@@ -2846,7 +2846,7 @@
           <a:p>
             <a:fld id="{C447D990-DE0D-4B15-97EE-FE12FA796ED0}" type="datetime1">
               <a:rPr lang="en-US" smtClean="0"/>
-              <a:t>3/30/2026</a:t>
+              <a:t>4/2/2026</a:t>
             </a:fld>
             <a:endParaRPr lang="en-US"/>
           </a:p>
@@ -3140,7 +3140,7 @@
           <a:p>
             <a:fld id="{2655E33F-BBF1-4DE1-97B3-4E0659F07D78}" type="datetime1">
               <a:rPr lang="en-US" smtClean="0"/>
-              <a:t>3/30/2026</a:t>
+              <a:t>4/2/2026</a:t>
             </a:fld>
             <a:endParaRPr lang="en-US"/>
           </a:p>
@@ -3381,7 +3381,7 @@
           <a:p>
             <a:fld id="{B35F2065-4641-4920-A1F2-DC9C9FD39E44}" type="datetime1">
               <a:rPr lang="en-US" smtClean="0"/>
-              <a:t>3/30/2026</a:t>
+              <a:t>4/2/2026</a:t>
             </a:fld>
             <a:endParaRPr lang="en-US"/>
           </a:p>
@@ -4102,7 +4102,7 @@
                   <a:schemeClr val="bg1"/>
                 </a:solidFill>
               </a:rPr>
-              <a:t> Data and</a:t>
+              <a:t> Data </a:t>
             </a:r>
             <a:br>
               <a:rPr lang="fi-FI" dirty="0">
@@ -4112,18 +4112,13 @@
               </a:rPr>
             </a:br>
             <a:r>
-              <a:rPr lang="fi-FI" dirty="0" err="1">
+              <a:rPr lang="fi-FI" dirty="0">
                 <a:solidFill>
                   <a:schemeClr val="bg1"/>
                 </a:solidFill>
               </a:rPr>
-              <a:t>Predictions</a:t>
-            </a:r>
-            <a:endParaRPr lang="fi-FI" dirty="0">
-              <a:solidFill>
-                <a:schemeClr val="bg1"/>
-              </a:solidFill>
-            </a:endParaRPr>
+              <a:t>Analysis</a:t>
+            </a:r>
           </a:p>
         </p:txBody>
       </p:sp>
@@ -4145,19 +4140,19 @@
         </p:nvSpPr>
         <p:spPr>
           <a:xfrm>
-            <a:off x="83059" y="4663724"/>
-            <a:ext cx="3409110" cy="950410"/>
+            <a:off x="83058" y="4663724"/>
+            <a:ext cx="3830573" cy="1481044"/>
           </a:xfrm>
         </p:spPr>
         <p:txBody>
           <a:bodyPr anchor="ctr">
-            <a:normAutofit fontScale="92500" lnSpcReduction="10000"/>
+            <a:normAutofit fontScale="62500" lnSpcReduction="20000"/>
           </a:bodyPr>
           <a:lstStyle/>
           <a:p>
             <a:pPr algn="r"/>
             <a:r>
-              <a:rPr lang="fi-FI" sz="2400" dirty="0">
+              <a:rPr lang="fi-FI" sz="2400" b="1" dirty="0">
                 <a:solidFill>
                   <a:schemeClr val="bg1"/>
                 </a:solidFill>
@@ -4168,12 +4163,31 @@
           <a:p>
             <a:pPr algn="r"/>
             <a:r>
-              <a:rPr lang="fi-FI" sz="2400" dirty="0">
+              <a:rPr lang="fi-FI" sz="2400" b="1" dirty="0">
                 <a:solidFill>
                   <a:schemeClr val="bg1"/>
                 </a:solidFill>
               </a:rPr>
               <a:t>Abbas</a:t>
+            </a:r>
+          </a:p>
+          <a:p>
+            <a:pPr algn="r"/>
+            <a:endParaRPr lang="fi-FI" sz="2400" b="1" dirty="0">
+              <a:solidFill>
+                <a:schemeClr val="bg1"/>
+              </a:solidFill>
+            </a:endParaRPr>
+          </a:p>
+          <a:p>
+            <a:pPr algn="r"/>
+            <a:r>
+              <a:rPr lang="fi-FI" sz="2400" b="1" dirty="0">
+                <a:solidFill>
+                  <a:schemeClr val="bg1"/>
+                </a:solidFill>
+              </a:rPr>
+              <a:t>07.04.2026</a:t>
             </a:r>
           </a:p>
         </p:txBody>
